--- a/m2.pptx
+++ b/m2.pptx
@@ -12,11 +12,12 @@
     <p:sldId id="260" r:id="rId6"/>
     <p:sldId id="261" r:id="rId7"/>
     <p:sldId id="267" r:id="rId8"/>
-    <p:sldId id="262" r:id="rId9"/>
-    <p:sldId id="263" r:id="rId10"/>
-    <p:sldId id="268" r:id="rId11"/>
-    <p:sldId id="264" r:id="rId12"/>
-    <p:sldId id="265" r:id="rId13"/>
+    <p:sldId id="269" r:id="rId9"/>
+    <p:sldId id="262" r:id="rId10"/>
+    <p:sldId id="263" r:id="rId11"/>
+    <p:sldId id="268" r:id="rId12"/>
+    <p:sldId id="264" r:id="rId13"/>
+    <p:sldId id="265" r:id="rId14"/>
   </p:sldIdLst>
   <p:sldSz cx="9144000" cy="6858000" type="screen4x3"/>
   <p:notesSz cx="6858000" cy="9144000"/>
@@ -6387,25 +6388,14 @@
             <p:ph type="title"/>
           </p:nvPr>
         </p:nvSpPr>
-        <p:spPr>
-          <a:xfrm>
-            <a:off x="249382" y="1184564"/>
-            <a:ext cx="2978727" cy="1711036"/>
-          </a:xfrm>
-        </p:spPr>
-        <p:txBody>
-          <a:bodyPr/>
-          <a:lstStyle/>
-          <a:p>
-            <a:r>
-              <a:rPr lang="en-US" sz="4400" dirty="0"/>
-              <a:t>Garbage </a:t>
-            </a:r>
-            <a:r>
-              <a:rPr lang="en-US" sz="4400" dirty="0" smtClean="0"/>
-              <a:t>Value:</a:t>
-            </a:r>
-            <a:endParaRPr lang="en-US" sz="4200" dirty="0"/>
+        <p:spPr/>
+        <p:txBody>
+          <a:bodyPr/>
+          <a:lstStyle/>
+          <a:p>
+            <a:r>
+              <a:t>Why Use Memory Management in Java</a:t>
+            </a:r>
           </a:p>
         </p:txBody>
       </p:sp>
@@ -6419,80 +6409,28 @@
             <p:ph idx="1"/>
           </p:nvPr>
         </p:nvSpPr>
-        <p:spPr>
-          <a:xfrm>
-            <a:off x="3352800" y="1184564"/>
-            <a:ext cx="5444835" cy="4835236"/>
-          </a:xfrm>
-        </p:spPr>
-        <p:txBody>
-          <a:bodyPr/>
-          <a:lstStyle/>
-          <a:p>
-            <a:endParaRPr lang="en-US" dirty="0"/>
-          </a:p>
-        </p:txBody>
-      </p:sp>
-      <p:sp>
-        <p:nvSpPr>
-          <p:cNvPr id="4" name="Text Placeholder 3"/>
-          <p:cNvSpPr>
-            <a:spLocks noGrp="1"/>
-          </p:cNvSpPr>
-          <p:nvPr>
-            <p:ph type="body" sz="half" idx="2"/>
-          </p:nvPr>
-        </p:nvSpPr>
-        <p:spPr>
-          <a:xfrm>
-            <a:off x="249382" y="3124201"/>
-            <a:ext cx="2836011" cy="2895599"/>
-          </a:xfrm>
-        </p:spPr>
-        <p:txBody>
-          <a:bodyPr/>
-          <a:lstStyle/>
-          <a:p>
-            <a:r>
-              <a:rPr lang="en-US" sz="2400" dirty="0"/>
-              <a:t>A </a:t>
-            </a:r>
-            <a:r>
-              <a:rPr lang="en-US" sz="2400" b="1" dirty="0"/>
-              <a:t>garbage value</a:t>
-            </a:r>
-            <a:r>
-              <a:rPr lang="en-US" sz="2400" dirty="0"/>
-              <a:t> is a </a:t>
-            </a:r>
-            <a:r>
-              <a:rPr lang="en-US" sz="2400" b="1" dirty="0"/>
-              <a:t>random or unknown value</a:t>
-            </a:r>
-            <a:r>
-              <a:rPr lang="en-US" sz="2400" dirty="0"/>
-              <a:t> stored in a variable when it is </a:t>
-            </a:r>
-            <a:r>
-              <a:rPr lang="en-US" sz="2400" b="1" dirty="0"/>
-              <a:t>not initialized</a:t>
-            </a:r>
-            <a:r>
-              <a:rPr lang="en-US" sz="2400" dirty="0"/>
-              <a:t>.</a:t>
-            </a:r>
-          </a:p>
-          <a:p>
-            <a:endParaRPr lang="en-US" sz="1600" dirty="0"/>
+        <p:spPr/>
+        <p:txBody>
+          <a:bodyPr/>
+          <a:lstStyle/>
+          <a:p>
+            <a:r>
+              <a:t>Prevents memory leaks</a:t>
+            </a:r>
+          </a:p>
+          <a:p>
+            <a:r>
+              <a:t>Improves safety</a:t>
+            </a:r>
+          </a:p>
+          <a:p>
+            <a:r>
+              <a:t>Reduces programmer effort</a:t>
+            </a:r>
           </a:p>
         </p:txBody>
       </p:sp>
     </p:spTree>
-    <p:extLst>
-      <p:ext uri="{BB962C8B-B14F-4D97-AF65-F5344CB8AC3E}">
-        <p14:creationId xmlns:p14="http://schemas.microsoft.com/office/powerpoint/2010/main" val="3488146226"/>
-      </p:ext>
-    </p:extLst>
   </p:cSld>
   <p:clrMapOvr>
     <a:masterClrMapping/>
@@ -6527,6 +6465,142 @@
             <p:ph type="title"/>
           </p:nvPr>
         </p:nvSpPr>
+        <p:spPr>
+          <a:xfrm>
+            <a:off x="249382" y="1184564"/>
+            <a:ext cx="2978727" cy="1711036"/>
+          </a:xfrm>
+        </p:spPr>
+        <p:txBody>
+          <a:bodyPr/>
+          <a:lstStyle/>
+          <a:p>
+            <a:r>
+              <a:rPr lang="en-US" sz="4400" dirty="0"/>
+              <a:t>Garbage Value:</a:t>
+            </a:r>
+            <a:endParaRPr lang="en-US" sz="4200" dirty="0"/>
+          </a:p>
+        </p:txBody>
+      </p:sp>
+      <p:sp>
+        <p:nvSpPr>
+          <p:cNvPr id="3" name="Content Placeholder 2"/>
+          <p:cNvSpPr>
+            <a:spLocks noGrp="1"/>
+          </p:cNvSpPr>
+          <p:nvPr>
+            <p:ph idx="1"/>
+          </p:nvPr>
+        </p:nvSpPr>
+        <p:spPr>
+          <a:xfrm>
+            <a:off x="3352800" y="1184564"/>
+            <a:ext cx="5444835" cy="4835236"/>
+          </a:xfrm>
+        </p:spPr>
+        <p:txBody>
+          <a:bodyPr/>
+          <a:lstStyle/>
+          <a:p>
+            <a:endParaRPr lang="en-US" dirty="0"/>
+          </a:p>
+        </p:txBody>
+      </p:sp>
+      <p:sp>
+        <p:nvSpPr>
+          <p:cNvPr id="4" name="Text Placeholder 3"/>
+          <p:cNvSpPr>
+            <a:spLocks noGrp="1"/>
+          </p:cNvSpPr>
+          <p:nvPr>
+            <p:ph type="body" sz="half" idx="2"/>
+          </p:nvPr>
+        </p:nvSpPr>
+        <p:spPr>
+          <a:xfrm>
+            <a:off x="249382" y="3124201"/>
+            <a:ext cx="2836011" cy="2895599"/>
+          </a:xfrm>
+        </p:spPr>
+        <p:txBody>
+          <a:bodyPr/>
+          <a:lstStyle/>
+          <a:p>
+            <a:r>
+              <a:rPr lang="en-US" sz="2400" dirty="0"/>
+              <a:t>A </a:t>
+            </a:r>
+            <a:r>
+              <a:rPr lang="en-US" sz="2400" b="1" dirty="0"/>
+              <a:t>garbage value</a:t>
+            </a:r>
+            <a:r>
+              <a:rPr lang="en-US" sz="2400" dirty="0"/>
+              <a:t> is a </a:t>
+            </a:r>
+            <a:r>
+              <a:rPr lang="en-US" sz="2400" b="1" dirty="0"/>
+              <a:t>random or unknown value</a:t>
+            </a:r>
+            <a:r>
+              <a:rPr lang="en-US" sz="2400" dirty="0"/>
+              <a:t> stored in a variable when it is </a:t>
+            </a:r>
+            <a:r>
+              <a:rPr lang="en-US" sz="2400" b="1" dirty="0"/>
+              <a:t>not initialized</a:t>
+            </a:r>
+            <a:r>
+              <a:rPr lang="en-US" sz="2400" dirty="0"/>
+              <a:t>.</a:t>
+            </a:r>
+          </a:p>
+          <a:p>
+            <a:endParaRPr lang="en-US" sz="1600" dirty="0"/>
+          </a:p>
+        </p:txBody>
+      </p:sp>
+    </p:spTree>
+    <p:extLst>
+      <p:ext uri="{BB962C8B-B14F-4D97-AF65-F5344CB8AC3E}">
+        <p14:creationId xmlns:p14="http://schemas.microsoft.com/office/powerpoint/2010/main" val="3488146226"/>
+      </p:ext>
+    </p:extLst>
+  </p:cSld>
+  <p:clrMapOvr>
+    <a:masterClrMapping/>
+  </p:clrMapOvr>
+</p:sld>
+</file>
+
+<file path=ppt/slides/slide12.xml><?xml version="1.0" encoding="utf-8"?>
+<p:sld xmlns:a="http://schemas.openxmlformats.org/drawingml/2006/main" xmlns:r="http://schemas.openxmlformats.org/officeDocument/2006/relationships" xmlns:p="http://schemas.openxmlformats.org/presentationml/2006/main">
+  <p:cSld>
+    <p:spTree>
+      <p:nvGrpSpPr>
+        <p:cNvPr id="1" name=""/>
+        <p:cNvGrpSpPr/>
+        <p:nvPr/>
+      </p:nvGrpSpPr>
+      <p:grpSpPr>
+        <a:xfrm>
+          <a:off x="0" y="0"/>
+          <a:ext cx="0" cy="0"/>
+          <a:chOff x="0" y="0"/>
+          <a:chExt cx="0" cy="0"/>
+        </a:xfrm>
+      </p:grpSpPr>
+      <p:sp>
+        <p:nvSpPr>
+          <p:cNvPr id="2" name="Title 1"/>
+          <p:cNvSpPr>
+            <a:spLocks noGrp="1"/>
+          </p:cNvSpPr>
+          <p:nvPr>
+            <p:ph type="title"/>
+          </p:nvPr>
+        </p:nvSpPr>
         <p:spPr/>
         <p:txBody>
           <a:bodyPr/>
@@ -6577,7 +6651,7 @@
 </p:sld>
 </file>
 
-<file path=ppt/slides/slide12.xml><?xml version="1.0" encoding="utf-8"?>
+<file path=ppt/slides/slide13.xml><?xml version="1.0" encoding="utf-8"?>
 <p:sld xmlns:a="http://schemas.openxmlformats.org/drawingml/2006/main" xmlns:r="http://schemas.openxmlformats.org/officeDocument/2006/relationships" xmlns:p="http://schemas.openxmlformats.org/presentationml/2006/main">
   <p:cSld>
     <p:spTree>
@@ -6707,61 +6781,37 @@
           <a:p>
             <a:r>
               <a:rPr lang="en-US" dirty="0"/>
-              <a:t>Memory management optimization is the efficient use of memory in a program</a:t>
-            </a:r>
-            <a:r>
-              <a:rPr lang="en-US" dirty="0" smtClean="0"/>
-              <a:t>.</a:t>
-            </a:r>
-          </a:p>
-          <a:p>
-            <a:endParaRPr lang="en-US" dirty="0" smtClean="0"/>
-          </a:p>
-          <a:p>
-            <a:r>
-              <a:rPr lang="en-US" dirty="0" smtClean="0"/>
-              <a:t>It </a:t>
-            </a:r>
+              <a:t>Memory management optimization is the efficient use of memory in a program.</a:t>
+            </a:r>
+          </a:p>
+          <a:p>
+            <a:endParaRPr lang="en-US" dirty="0"/>
+          </a:p>
+          <a:p>
             <a:r>
               <a:rPr lang="en-US" dirty="0"/>
-              <a:t>helps reduce memory wastage and improves </a:t>
-            </a:r>
-            <a:r>
-              <a:rPr lang="en-US" dirty="0" smtClean="0"/>
-              <a:t>performance.</a:t>
-            </a:r>
-          </a:p>
-          <a:p>
-            <a:endParaRPr lang="en-US" dirty="0" smtClean="0"/>
-          </a:p>
-          <a:p>
-            <a:r>
-              <a:rPr lang="en-US" dirty="0" smtClean="0"/>
-              <a:t>It </a:t>
-            </a:r>
+              <a:t>It helps reduce memory wastage and improves performance.</a:t>
+            </a:r>
+          </a:p>
+          <a:p>
+            <a:endParaRPr lang="en-US" dirty="0"/>
+          </a:p>
+          <a:p>
             <a:r>
               <a:rPr lang="en-US" dirty="0"/>
-              <a:t>ensures proper allocation and deallocation of memory</a:t>
-            </a:r>
-            <a:r>
-              <a:rPr lang="en-US" dirty="0" smtClean="0"/>
-              <a:t>.</a:t>
+              <a:t>It ensures proper allocation and deallocation of memory.</a:t>
             </a:r>
           </a:p>
           <a:p>
             <a:pPr marL="0" indent="0">
               <a:buNone/>
             </a:pPr>
-            <a:endParaRPr lang="en-US" dirty="0" smtClean="0"/>
-          </a:p>
-          <a:p>
-            <a:r>
-              <a:rPr lang="en-US" dirty="0" smtClean="0"/>
-              <a:t>It </a:t>
-            </a:r>
+            <a:endParaRPr lang="en-US" dirty="0"/>
+          </a:p>
+          <a:p>
             <a:r>
               <a:rPr lang="en-US" dirty="0"/>
-              <a:t>prevents problems like memory leaks and fragmentation.</a:t>
+              <a:t>It prevents problems like memory leaks and fragmentation.</a:t>
             </a:r>
           </a:p>
         </p:txBody>
@@ -6807,16 +6857,12 @@
           <a:lstStyle/>
           <a:p>
             <a:r>
-              <a:rPr lang="en-US" b="1" dirty="0" smtClean="0"/>
+              <a:rPr lang="en-US" b="1" dirty="0"/>
               <a:t> </a:t>
             </a:r>
             <a:r>
-              <a:rPr lang="en-US" dirty="0" smtClean="0"/>
+              <a:rPr lang="en-US" dirty="0"/>
               <a:t>What is Memory Optimization </a:t>
-            </a:r>
-            <a:r>
-              <a:rPr lang="en-US" b="1" dirty="0"/>
-              <a:t/>
             </a:r>
             <a:br>
               <a:rPr lang="en-US" b="1" dirty="0"/>
@@ -6856,12 +6902,8 @@
               <a:buNone/>
             </a:pPr>
             <a:r>
-              <a:rPr lang="en-US" dirty="0" smtClean="0"/>
-              <a:t>          Reducing </a:t>
-            </a:r>
-            <a:r>
               <a:rPr lang="en-US" dirty="0"/>
-              <a:t>unnecessary memory usage </a:t>
+              <a:t>          Reducing unnecessary memory usage </a:t>
             </a:r>
           </a:p>
           <a:p>
@@ -6869,38 +6911,17 @@
               <a:buNone/>
             </a:pPr>
             <a:r>
-              <a:rPr lang="en-US" dirty="0" smtClean="0"/>
-              <a:t>       </a:t>
-            </a:r>
-            <a:r>
-              <a:rPr lang="en-US" dirty="0" smtClean="0"/>
-              <a:t>   </a:t>
-            </a:r>
-            <a:r>
-              <a:rPr lang="en-US" dirty="0" smtClean="0"/>
-              <a:t>Improving </a:t>
-            </a:r>
-            <a:r>
               <a:rPr lang="en-US" dirty="0"/>
-              <a:t>allocation/deallocation </a:t>
-            </a:r>
-            <a:r>
-              <a:rPr lang="en-US" dirty="0" smtClean="0"/>
-              <a:t>efficiency</a:t>
-            </a:r>
-            <a:endParaRPr lang="en-US" dirty="0"/>
+              <a:t>          Improving allocation/deallocation efficiency</a:t>
+            </a:r>
           </a:p>
           <a:p>
             <a:pPr marL="0" indent="0">
               <a:buNone/>
             </a:pPr>
             <a:r>
-              <a:rPr lang="en-US" dirty="0" smtClean="0"/>
-              <a:t>          Preventing </a:t>
-            </a:r>
-            <a:r>
               <a:rPr lang="en-US" dirty="0"/>
-              <a:t>memory leaks and fragmentation</a:t>
+              <a:t>          Preventing memory leaks and fragmentation</a:t>
             </a:r>
           </a:p>
           <a:p>
@@ -7213,20 +7234,16 @@
           <a:lstStyle/>
           <a:p>
             <a:r>
-              <a:rPr dirty="0" smtClean="0"/>
+              <a:rPr dirty="0"/>
               <a:t>Types</a:t>
             </a:r>
             <a:r>
-              <a:rPr lang="en-US" dirty="0" smtClean="0"/>
+              <a:rPr lang="en-US" dirty="0"/>
               <a:t> of memory</a:t>
             </a:r>
             <a:r>
-              <a:rPr dirty="0" smtClean="0"/>
-              <a:t> </a:t>
-            </a:r>
-            <a:r>
               <a:rPr dirty="0"/>
-              <a:t>in C</a:t>
+              <a:t> in C</a:t>
             </a:r>
           </a:p>
         </p:txBody>
@@ -7253,88 +7270,50 @@
           <a:p>
             <a:r>
               <a:rPr dirty="0"/>
-              <a:t>1. Static </a:t>
-            </a:r>
-            <a:r>
-              <a:rPr dirty="0" smtClean="0"/>
-              <a:t>Allocation</a:t>
-            </a:r>
-            <a:r>
-              <a:rPr lang="en-US" b="1" dirty="0" smtClean="0"/>
+              <a:t>1. Static Allocation</a:t>
+            </a:r>
+            <a:r>
+              <a:rPr lang="en-US" b="1" dirty="0"/>
               <a:t>: </a:t>
             </a:r>
             <a:r>
               <a:rPr lang="en-US" dirty="0"/>
-              <a:t>Static allocation is a type of memory allocation where memory is assigned at compile time (before the program runs), and its size cannot be changed later</a:t>
-            </a:r>
-            <a:r>
-              <a:rPr lang="en-US" dirty="0" smtClean="0"/>
-              <a:t>. For examples</a:t>
+              <a:t>Static allocation is a type of memory allocation where memory is assigned at compile time (before the program runs), and its size cannot be changed later. For examples</a:t>
             </a:r>
           </a:p>
           <a:p>
             <a:pPr marL="0" indent="0">
               <a:buNone/>
             </a:pPr>
-            <a:endParaRPr lang="en-US" dirty="0" smtClean="0"/>
-          </a:p>
-          <a:p>
-            <a:r>
-              <a:rPr lang="en-US" dirty="0" smtClean="0"/>
-              <a:t>int </a:t>
-            </a:r>
+            <a:endParaRPr lang="en-US" dirty="0"/>
+          </a:p>
+          <a:p>
             <a:r>
               <a:rPr lang="en-US" dirty="0"/>
-              <a:t>a = 10;      // single </a:t>
-            </a:r>
-            <a:r>
-              <a:rPr lang="en-US" dirty="0" smtClean="0"/>
-              <a:t>variable.</a:t>
-            </a:r>
-            <a:endParaRPr lang="en-US" dirty="0"/>
-          </a:p>
-          <a:p>
-            <a:r>
-              <a:rPr lang="en-US" dirty="0" smtClean="0"/>
-              <a:t>int </a:t>
-            </a:r>
+              <a:t>int a = 10;      // single variable.</a:t>
+            </a:r>
+          </a:p>
+          <a:p>
             <a:r>
               <a:rPr lang="en-US" dirty="0"/>
-              <a:t>arr[5];      // fixed-size </a:t>
-            </a:r>
-            <a:r>
-              <a:rPr lang="en-US" dirty="0" smtClean="0"/>
-              <a:t>array.</a:t>
+              <a:t>int arr[5];      // fixed-size array.</a:t>
             </a:r>
           </a:p>
           <a:p>
             <a:pPr marL="0" indent="0">
               <a:buNone/>
             </a:pPr>
-            <a:endParaRPr dirty="0" smtClean="0"/>
+            <a:endParaRPr dirty="0"/>
           </a:p>
           <a:p>
             <a:r>
               <a:rPr dirty="0"/>
-              <a:t>2. Dynamic Allocation (Heap</a:t>
-            </a:r>
-            <a:r>
-              <a:rPr dirty="0" smtClean="0"/>
-              <a:t>)</a:t>
-            </a:r>
-            <a:r>
-              <a:rPr lang="en-US" dirty="0" smtClean="0"/>
-              <a:t>: </a:t>
+              <a:t>2. Dynamic Allocation (Heap)</a:t>
             </a:r>
             <a:r>
               <a:rPr lang="en-US" dirty="0"/>
-              <a:t>Dynamic Memory Allocation (DMA) means memory is allocated during program execution (runtime) and can be changed or freed whenever needed</a:t>
-            </a:r>
-            <a:r>
-              <a:rPr lang="en-US" dirty="0" smtClean="0"/>
-              <a:t>.</a:t>
-            </a:r>
-            <a:endParaRPr lang="en-US" dirty="0"/>
+              <a:t>: Dynamic Memory Allocation (DMA) means memory is allocated during program execution (runtime) and can be changed or freed whenever needed.</a:t>
+            </a:r>
           </a:p>
         </p:txBody>
       </p:sp>
@@ -7411,19 +7390,19 @@
           <a:lstStyle/>
           <a:p>
             <a:r>
-              <a:rPr lang="en-US" dirty="0" smtClean="0"/>
+              <a:rPr lang="en-US" dirty="0"/>
               <a:t>M</a:t>
             </a:r>
             <a:r>
-              <a:rPr dirty="0" smtClean="0"/>
+              <a:rPr dirty="0"/>
               <a:t>alloc</a:t>
             </a:r>
             <a:r>
-              <a:rPr lang="en-US" dirty="0" smtClean="0"/>
+              <a:rPr lang="en-US" dirty="0"/>
               <a:t>():</a:t>
             </a:r>
             <a:r>
-              <a:rPr lang="en-US" altLang="en-US" dirty="0" smtClean="0">
+              <a:rPr lang="en-US" altLang="en-US" dirty="0">
                 <a:solidFill>
                   <a:srgbClr val="0A0A0A"/>
                 </a:solidFill>
@@ -7435,13 +7414,7 @@
               <a:rPr lang="en-US" altLang="en-US" dirty="0">
                 <a:latin typeface="Google Sans"/>
               </a:rPr>
-              <a:t>Allocates a single block of uninitialized "garbage" memory of the specified byte </a:t>
-            </a:r>
-            <a:r>
-              <a:rPr lang="en-US" altLang="en-US" dirty="0" smtClean="0">
-                <a:latin typeface="Google Sans"/>
-              </a:rPr>
-              <a:t>size</a:t>
+              <a:t>Allocates a single block of uninitialized "garbage" memory of the specified byte size</a:t>
             </a:r>
           </a:p>
           <a:p>
@@ -7449,11 +7422,11 @@
           </a:p>
           <a:p>
             <a:r>
-              <a:rPr dirty="0" smtClean="0"/>
+              <a:rPr dirty="0"/>
               <a:t>calloc()</a:t>
             </a:r>
             <a:r>
-              <a:rPr lang="en-GB" dirty="0" smtClean="0"/>
+              <a:rPr lang="en-GB" dirty="0"/>
               <a:t>:</a:t>
             </a:r>
             <a:r>
@@ -7472,15 +7445,9 @@
               <a:rPr lang="en-US" altLang="en-US" dirty="0">
                 <a:latin typeface="Google Sans"/>
               </a:rPr>
-              <a:t> elements and initializes all bytes to </a:t>
-            </a:r>
-            <a:r>
-              <a:rPr lang="en-US" altLang="en-US" dirty="0" smtClean="0">
-                <a:latin typeface="Google Sans"/>
-              </a:rPr>
-              <a:t>zero.</a:t>
-            </a:r>
-            <a:endParaRPr lang="en-US" dirty="0" smtClean="0"/>
+              <a:t> elements and initializes all bytes to zero.</a:t>
+            </a:r>
+            <a:endParaRPr lang="en-US" dirty="0"/>
           </a:p>
           <a:p>
             <a:pPr marL="0" indent="0">
@@ -7491,31 +7458,22 @@
           <a:p>
             <a:r>
               <a:rPr dirty="0"/>
-              <a:t> free</a:t>
-            </a:r>
-            <a:r>
-              <a:rPr dirty="0" smtClean="0"/>
-              <a:t>()</a:t>
-            </a:r>
-            <a:r>
-              <a:rPr lang="en-GB" dirty="0" smtClean="0"/>
+              <a:t> free()</a:t>
+            </a:r>
+            <a:r>
+              <a:rPr lang="en-GB" dirty="0"/>
               <a:t>: </a:t>
             </a:r>
             <a:r>
-              <a:rPr lang="en-US" dirty="0" smtClean="0"/>
-              <a:t>Releases </a:t>
-            </a:r>
-            <a:r>
               <a:rPr lang="en-US" dirty="0"/>
-              <a:t>the allocated memory block back to the system. </a:t>
-            </a:r>
-            <a:endParaRPr lang="en-US" dirty="0" smtClean="0"/>
+              <a:t>Releases the allocated memory block back to the system. </a:t>
+            </a:r>
           </a:p>
           <a:p>
             <a:endParaRPr lang="en-US" dirty="0"/>
           </a:p>
           <a:p>
-            <a:endParaRPr lang="en-GB" dirty="0" smtClean="0"/>
+            <a:endParaRPr lang="en-GB" dirty="0"/>
           </a:p>
           <a:p>
             <a:endParaRPr dirty="0"/>
@@ -7720,7 +7678,7 @@
               <a:tabLst/>
             </a:pPr>
             <a:r>
-              <a:rPr kumimoji="0" lang="en-US" altLang="en-US" sz="1000" b="1" i="0" u="none" strike="noStrike" cap="none" normalizeH="0" baseline="0" dirty="0" smtClean="0">
+              <a:rPr kumimoji="0" lang="en-US" altLang="en-US" sz="1000" b="1" i="0" u="none" strike="noStrike" cap="none" normalizeH="0" baseline="0" dirty="0">
                 <a:ln>
                   <a:noFill/>
                 </a:ln>
@@ -7733,7 +7691,7 @@
               <a:t>(</a:t>
             </a:r>
             <a:r>
-              <a:rPr kumimoji="0" lang="en-US" altLang="en-US" sz="1000" b="0" i="0" u="none" strike="noStrike" cap="none" normalizeH="0" baseline="0" dirty="0" smtClean="0">
+              <a:rPr kumimoji="0" lang="en-US" altLang="en-US" sz="1000" b="0" i="0" u="none" strike="noStrike" cap="none" normalizeH="0" baseline="0" dirty="0">
                 <a:ln>
                   <a:noFill/>
                 </a:ln>
@@ -7746,7 +7704,7 @@
               <a:t>.</a:t>
             </a:r>
             <a:r>
-              <a:rPr kumimoji="0" lang="en-US" altLang="en-US" sz="1100" b="0" i="0" u="none" strike="noStrike" cap="none" normalizeH="0" baseline="0" dirty="0" smtClean="0">
+              <a:rPr kumimoji="0" lang="en-US" altLang="en-US" sz="1100" b="0" i="0" u="none" strike="noStrike" cap="none" normalizeH="0" baseline="0" dirty="0">
                 <a:ln>
                   <a:noFill/>
                 </a:ln>
@@ -7757,7 +7715,7 @@
               </a:rPr>
               <a:t> </a:t>
             </a:r>
-            <a:endParaRPr kumimoji="0" lang="en-US" altLang="en-US" sz="1800" b="0" i="0" u="none" strike="noStrike" cap="none" normalizeH="0" baseline="0" dirty="0" smtClean="0">
+            <a:endParaRPr kumimoji="0" lang="en-US" altLang="en-US" sz="1800" b="0" i="0" u="none" strike="noStrike" cap="none" normalizeH="0" baseline="0" dirty="0">
               <a:ln>
                 <a:noFill/>
               </a:ln>
@@ -7968,7 +7926,7 @@
               <a:tabLst/>
             </a:pPr>
             <a:r>
-              <a:rPr kumimoji="0" lang="en-US" altLang="en-US" sz="1000" b="0" i="0" u="none" strike="noStrike" cap="none" normalizeH="0" baseline="0" dirty="0" smtClean="0">
+              <a:rPr kumimoji="0" lang="en-US" altLang="en-US" sz="1000" b="0" i="0" u="none" strike="noStrike" cap="none" normalizeH="0" baseline="0" dirty="0">
                 <a:ln>
                   <a:noFill/>
                 </a:ln>
@@ -7981,7 +7939,7 @@
               <a:t>:.</a:t>
             </a:r>
             <a:r>
-              <a:rPr kumimoji="0" lang="en-US" altLang="en-US" sz="1100" b="0" i="0" u="none" strike="noStrike" cap="none" normalizeH="0" baseline="0" dirty="0" smtClean="0">
+              <a:rPr kumimoji="0" lang="en-US" altLang="en-US" sz="1100" b="0" i="0" u="none" strike="noStrike" cap="none" normalizeH="0" baseline="0" dirty="0">
                 <a:ln>
                   <a:noFill/>
                 </a:ln>
@@ -7992,7 +7950,7 @@
               </a:rPr>
               <a:t> </a:t>
             </a:r>
-            <a:endParaRPr kumimoji="0" lang="en-US" altLang="en-US" sz="1800" b="0" i="0" u="none" strike="noStrike" cap="none" normalizeH="0" baseline="0" dirty="0" smtClean="0">
+            <a:endParaRPr kumimoji="0" lang="en-US" altLang="en-US" sz="1800" b="0" i="0" u="none" strike="noStrike" cap="none" normalizeH="0" baseline="0" dirty="0">
               <a:ln>
                 <a:noFill/>
               </a:ln>
@@ -8047,23 +8005,7 @@
           <a:p>
             <a:r>
               <a:rPr lang="en-US" dirty="0"/>
-              <a:t>Memory </a:t>
-            </a:r>
-            <a:r>
-              <a:rPr lang="en-US" dirty="0" smtClean="0"/>
-              <a:t> </a:t>
-            </a:r>
-            <a:r>
-              <a:rPr lang="en-US" dirty="0"/>
-              <a:t>Layout of a C </a:t>
-            </a:r>
-            <a:r>
-              <a:rPr lang="en-US" dirty="0" smtClean="0"/>
-              <a:t>Program</a:t>
-            </a:r>
-            <a:r>
-              <a:rPr lang="en-US" dirty="0"/>
-              <a:t/>
+              <a:t>Memory  Layout of a C Program</a:t>
             </a:r>
             <a:br>
               <a:rPr lang="en-US" dirty="0"/>
@@ -8133,7 +8075,13 @@
       </p:grpSpPr>
       <p:sp>
         <p:nvSpPr>
-          <p:cNvPr id="2" name="Title 1"/>
+          <p:cNvPr id="2" name="Title 1">
+            <a:extLst>
+              <a:ext uri="{FF2B5EF4-FFF2-40B4-BE49-F238E27FC236}">
+                <a16:creationId xmlns:a16="http://schemas.microsoft.com/office/drawing/2014/main" id="{B99B6619-E452-1AB2-848E-CC8FD5546FD8}"/>
+              </a:ext>
+            </a:extLst>
+          </p:cNvPr>
           <p:cNvSpPr>
             <a:spLocks noGrp="1"/>
           </p:cNvSpPr>
@@ -8141,44 +8089,205 @@
             <p:ph type="title"/>
           </p:nvPr>
         </p:nvSpPr>
-        <p:spPr/>
-        <p:txBody>
-          <a:bodyPr/>
-          <a:lstStyle/>
-          <a:p>
-            <a:r>
-              <a:t>Memory Management in Java</a:t>
-            </a:r>
-          </a:p>
-        </p:txBody>
-      </p:sp>
-      <p:sp>
-        <p:nvSpPr>
-          <p:cNvPr id="3" name="Content Placeholder 2"/>
-          <p:cNvSpPr>
-            <a:spLocks noGrp="1"/>
-          </p:cNvSpPr>
+        <p:spPr>
+          <a:xfrm>
+            <a:off x="205484" y="154112"/>
+            <a:ext cx="3339100" cy="678096"/>
+          </a:xfrm>
+        </p:spPr>
+        <p:txBody>
+          <a:bodyPr/>
+          <a:lstStyle/>
+          <a:p>
+            <a:r>
+              <a:rPr lang="en-IN" sz="3200" dirty="0"/>
+              <a:t>Garbage Value </a:t>
+            </a:r>
+          </a:p>
+        </p:txBody>
+      </p:sp>
+      <p:sp>
+        <p:nvSpPr>
+          <p:cNvPr id="4" name="Text Placeholder 3">
+            <a:extLst>
+              <a:ext uri="{FF2B5EF4-FFF2-40B4-BE49-F238E27FC236}">
+                <a16:creationId xmlns:a16="http://schemas.microsoft.com/office/drawing/2014/main" id="{9C82AB52-0F93-7FF1-152E-77405F572658}"/>
+              </a:ext>
+            </a:extLst>
+          </p:cNvPr>
+          <p:cNvSpPr>
+            <a:spLocks noGrp="1"/>
+          </p:cNvSpPr>
+          <p:nvPr>
+            <p:ph type="body" sz="half" idx="2"/>
+          </p:nvPr>
+        </p:nvSpPr>
+        <p:spPr>
+          <a:xfrm>
+            <a:off x="287676" y="2157573"/>
+            <a:ext cx="3130227" cy="4284324"/>
+          </a:xfrm>
+        </p:spPr>
+        <p:txBody>
+          <a:bodyPr>
+            <a:normAutofit/>
+          </a:bodyPr>
+          <a:lstStyle/>
+          <a:p>
+            <a:r>
+              <a:rPr lang="en-GB" dirty="0"/>
+              <a:t>  </a:t>
+            </a:r>
+          </a:p>
+          <a:p>
+            <a:endParaRPr lang="en-GB" dirty="0"/>
+          </a:p>
+          <a:p>
+            <a:endParaRPr lang="en-IN" dirty="0"/>
+          </a:p>
+        </p:txBody>
+      </p:sp>
+      <p:pic>
+        <p:nvPicPr>
+          <p:cNvPr id="13" name="Content Placeholder 12">
+            <a:extLst>
+              <a:ext uri="{FF2B5EF4-FFF2-40B4-BE49-F238E27FC236}">
+                <a16:creationId xmlns:a16="http://schemas.microsoft.com/office/drawing/2014/main" id="{ABA1158E-EE08-2991-28EA-B349E8BBDC70}"/>
+              </a:ext>
+            </a:extLst>
+          </p:cNvPr>
+          <p:cNvPicPr>
+            <a:picLocks noGrp="1" noChangeAspect="1"/>
+          </p:cNvPicPr>
           <p:nvPr>
             <p:ph idx="1"/>
           </p:nvPr>
-        </p:nvSpPr>
-        <p:spPr/>
-        <p:txBody>
-          <a:bodyPr/>
-          <a:lstStyle/>
-          <a:p>
-            <a:r>
-              <a:t>Automatic memory management</a:t>
-            </a:r>
-          </a:p>
-          <a:p>
-            <a:r>
-              <a:t>Handled by JVM using Garbage Collection</a:t>
-            </a:r>
+        </p:nvPicPr>
+        <p:blipFill>
+          <a:blip r:embed="rId2"/>
+          <a:stretch>
+            <a:fillRect/>
+          </a:stretch>
+        </p:blipFill>
+        <p:spPr>
+          <a:xfrm>
+            <a:off x="205484" y="1962364"/>
+            <a:ext cx="8650840" cy="4654193"/>
+          </a:xfrm>
+          <a:prstGeom prst="rect">
+            <a:avLst/>
+          </a:prstGeom>
+        </p:spPr>
+      </p:pic>
+      <p:sp>
+        <p:nvSpPr>
+          <p:cNvPr id="16" name="TextBox 15">
+            <a:extLst>
+              <a:ext uri="{FF2B5EF4-FFF2-40B4-BE49-F238E27FC236}">
+                <a16:creationId xmlns:a16="http://schemas.microsoft.com/office/drawing/2014/main" id="{2B769FD4-D1B6-A27D-54BE-573EB6F806AB}"/>
+              </a:ext>
+            </a:extLst>
+          </p:cNvPr>
+          <p:cNvSpPr txBox="1"/>
+          <p:nvPr/>
+        </p:nvSpPr>
+        <p:spPr>
+          <a:xfrm>
+            <a:off x="205484" y="1140431"/>
+            <a:ext cx="8733032" cy="1046440"/>
+          </a:xfrm>
+          <a:prstGeom prst="rect">
+            <a:avLst/>
+          </a:prstGeom>
+          <a:noFill/>
+        </p:spPr>
+        <p:txBody>
+          <a:bodyPr wrap="square" rtlCol="0">
+            <a:spAutoFit/>
+          </a:bodyPr>
+          <a:lstStyle/>
+          <a:p>
+            <a:r>
+              <a:rPr lang="en-GB" sz="2200" i="1" dirty="0"/>
+              <a:t>      Garbage value</a:t>
+            </a:r>
+            <a:r>
+              <a:rPr lang="en-GB" sz="2200" dirty="0"/>
+              <a:t> means a variable contains a random value because it is not initialized</a:t>
+            </a:r>
+            <a:r>
+              <a:rPr lang="en-GB" dirty="0"/>
+              <a:t>.</a:t>
+            </a:r>
+          </a:p>
+          <a:p>
+            <a:endParaRPr lang="en-IN" dirty="0"/>
+          </a:p>
+        </p:txBody>
+      </p:sp>
+      <p:sp>
+        <p:nvSpPr>
+          <p:cNvPr id="17" name="Arrow: Right 16">
+            <a:extLst>
+              <a:ext uri="{FF2B5EF4-FFF2-40B4-BE49-F238E27FC236}">
+                <a16:creationId xmlns:a16="http://schemas.microsoft.com/office/drawing/2014/main" id="{04D2E794-8AF4-0B1F-9728-002416FE361B}"/>
+              </a:ext>
+            </a:extLst>
+          </p:cNvPr>
+          <p:cNvSpPr/>
+          <p:nvPr/>
+        </p:nvSpPr>
+        <p:spPr>
+          <a:xfrm>
+            <a:off x="287676" y="1187486"/>
+            <a:ext cx="462337" cy="363911"/>
+          </a:xfrm>
+          <a:prstGeom prst="rightArrow">
+            <a:avLst>
+              <a:gd name="adj1" fmla="val 44353"/>
+              <a:gd name="adj2" fmla="val 47880"/>
+            </a:avLst>
+          </a:prstGeom>
+          <a:solidFill>
+            <a:srgbClr val="00B050"/>
+          </a:solidFill>
+          <a:ln>
+            <a:solidFill>
+              <a:schemeClr val="bg1"/>
+            </a:solidFill>
+          </a:ln>
+        </p:spPr>
+        <p:style>
+          <a:lnRef idx="2">
+            <a:schemeClr val="accent1">
+              <a:shade val="15000"/>
+            </a:schemeClr>
+          </a:lnRef>
+          <a:fillRef idx="1">
+            <a:schemeClr val="accent1"/>
+          </a:fillRef>
+          <a:effectRef idx="0">
+            <a:schemeClr val="accent1"/>
+          </a:effectRef>
+          <a:fontRef idx="minor">
+            <a:schemeClr val="lt1"/>
+          </a:fontRef>
+        </p:style>
+        <p:txBody>
+          <a:bodyPr rtlCol="0" anchor="ctr"/>
+          <a:lstStyle/>
+          <a:p>
+            <a:pPr algn="ctr"/>
+            <a:endParaRPr lang="en-IN" dirty="0"/>
           </a:p>
         </p:txBody>
       </p:sp>
     </p:spTree>
+    <p:extLst>
+      <p:ext uri="{BB962C8B-B14F-4D97-AF65-F5344CB8AC3E}">
+        <p14:creationId xmlns:p14="http://schemas.microsoft.com/office/powerpoint/2010/main" val="1124875922"/>
+      </p:ext>
+    </p:extLst>
   </p:cSld>
   <p:clrMapOvr>
     <a:masterClrMapping/>
@@ -8219,7 +8328,7 @@
           <a:lstStyle/>
           <a:p>
             <a:r>
-              <a:t>Why Use Memory Management in Java</a:t>
+              <a:t>Memory Management in Java</a:t>
             </a:r>
           </a:p>
         </p:txBody>
@@ -8240,17 +8349,14 @@
           <a:lstStyle/>
           <a:p>
             <a:r>
-              <a:t>Prevents memory leaks</a:t>
-            </a:r>
-          </a:p>
-          <a:p>
-            <a:r>
-              <a:t>Improves safety</a:t>
-            </a:r>
-          </a:p>
-          <a:p>
-            <a:r>
-              <a:t>Reduces programmer effort</a:t>
+              <a:rPr dirty="0"/>
+              <a:t>Automatic memory management</a:t>
+            </a:r>
+          </a:p>
+          <a:p>
+            <a:r>
+              <a:rPr dirty="0"/>
+              <a:t>Handled by JVM using Garbage Collection</a:t>
             </a:r>
           </a:p>
         </p:txBody>
